--- a/project_submission/reports/IBM_HR_Attrition_Executive_Summary.pptx
+++ b/project_submission/reports/IBM_HR_Attrition_Executive_Summary.pptx
@@ -9,6 +9,13 @@
     <p:sldId id="257" r:id="rId8"/>
     <p:sldId id="258" r:id="rId9"/>
     <p:sldId id="259" r:id="rId10"/>
+    <p:sldId id="260" r:id="rId11"/>
+    <p:sldId id="261" r:id="rId12"/>
+    <p:sldId id="262" r:id="rId13"/>
+    <p:sldId id="263" r:id="rId14"/>
+    <p:sldId id="264" r:id="rId15"/>
+    <p:sldId id="265" r:id="rId16"/>
+    <p:sldId id="266" r:id="rId17"/>
   </p:sldIdLst>
   <p:sldSz cx="12191695" cy="6858000" type="screen4x3"/>
   <p:notesSz cx="6858000" cy="9144000"/>
@@ -3257,6 +3264,132 @@
 </p:sld>
 </file>
 
+<file path=ppt/slides/slide10.xml><?xml version="1.0" encoding="utf-8"?>
+<p:sld xmlns:a="http://schemas.openxmlformats.org/drawingml/2006/main" xmlns:p="http://schemas.openxmlformats.org/presentationml/2006/main" xmlns:r="http://schemas.openxmlformats.org/officeDocument/2006/relationships">
+  <p:cSld>
+    <p:spTree>
+      <p:nvGrpSpPr>
+        <p:cNvPr id="1" name=""/>
+        <p:cNvGrpSpPr/>
+        <p:nvPr/>
+      </p:nvGrpSpPr>
+      <p:grpSpPr/>
+      <p:sp>
+        <p:nvSpPr>
+          <p:cNvPr id="2" name="Title 1"/>
+          <p:cNvSpPr>
+            <a:spLocks noGrp="1"/>
+          </p:cNvSpPr>
+          <p:nvPr>
+            <p:ph type="title"/>
+          </p:nvPr>
+        </p:nvSpPr>
+        <p:spPr/>
+        <p:txBody>
+          <a:bodyPr/>
+          <a:lstStyle/>
+          <a:p>
+            <a:r>
+              <a:t>04 Attrition By Role</a:t>
+            </a:r>
+          </a:p>
+        </p:txBody>
+      </p:sp>
+      <p:pic>
+        <p:nvPicPr>
+          <p:cNvPr id="3" name="Picture 2" descr="04_attrition_by_role.png"/>
+          <p:cNvPicPr>
+            <a:picLocks noChangeAspect="1"/>
+          </p:cNvPicPr>
+          <p:nvPr/>
+        </p:nvPicPr>
+        <p:blipFill>
+          <a:blip r:embed="rId2"/>
+          <a:stretch>
+            <a:fillRect/>
+          </a:stretch>
+        </p:blipFill>
+        <p:spPr>
+          <a:xfrm>
+            <a:off x="731520" y="1143000"/>
+            <a:ext cx="10698480" cy="6686550"/>
+          </a:xfrm>
+          <a:prstGeom prst="rect">
+            <a:avLst/>
+          </a:prstGeom>
+        </p:spPr>
+      </p:pic>
+    </p:spTree>
+  </p:cSld>
+  <p:clrMapOvr>
+    <a:masterClrMapping/>
+  </p:clrMapOvr>
+</p:sld>
+</file>
+
+<file path=ppt/slides/slide11.xml><?xml version="1.0" encoding="utf-8"?>
+<p:sld xmlns:a="http://schemas.openxmlformats.org/drawingml/2006/main" xmlns:p="http://schemas.openxmlformats.org/presentationml/2006/main" xmlns:r="http://schemas.openxmlformats.org/officeDocument/2006/relationships">
+  <p:cSld>
+    <p:spTree>
+      <p:nvGrpSpPr>
+        <p:cNvPr id="1" name=""/>
+        <p:cNvGrpSpPr/>
+        <p:nvPr/>
+      </p:nvGrpSpPr>
+      <p:grpSpPr/>
+      <p:sp>
+        <p:nvSpPr>
+          <p:cNvPr id="2" name="Title 1"/>
+          <p:cNvSpPr>
+            <a:spLocks noGrp="1"/>
+          </p:cNvSpPr>
+          <p:nvPr>
+            <p:ph type="title"/>
+          </p:nvPr>
+        </p:nvSpPr>
+        <p:spPr/>
+        <p:txBody>
+          <a:bodyPr/>
+          <a:lstStyle/>
+          <a:p>
+            <a:r>
+              <a:t>05 Attrition Split Overtime</a:t>
+            </a:r>
+          </a:p>
+        </p:txBody>
+      </p:sp>
+      <p:pic>
+        <p:nvPicPr>
+          <p:cNvPr id="3" name="Picture 2" descr="05_attrition_split_overtime.png"/>
+          <p:cNvPicPr>
+            <a:picLocks noChangeAspect="1"/>
+          </p:cNvPicPr>
+          <p:nvPr/>
+        </p:nvPicPr>
+        <p:blipFill>
+          <a:blip r:embed="rId2"/>
+          <a:stretch>
+            <a:fillRect/>
+          </a:stretch>
+        </p:blipFill>
+        <p:spPr>
+          <a:xfrm>
+            <a:off x="731520" y="1143000"/>
+            <a:ext cx="10698480" cy="7641771"/>
+          </a:xfrm>
+          <a:prstGeom prst="rect">
+            <a:avLst/>
+          </a:prstGeom>
+        </p:spPr>
+      </p:pic>
+    </p:spTree>
+  </p:cSld>
+  <p:clrMapOvr>
+    <a:masterClrMapping/>
+  </p:clrMapOvr>
+</p:sld>
+</file>
+
 <file path=ppt/slides/slide2.xml><?xml version="1.0" encoding="utf-8"?>
 <p:sld xmlns:a="http://schemas.openxmlformats.org/drawingml/2006/main" xmlns:p="http://schemas.openxmlformats.org/presentationml/2006/main" xmlns:r="http://schemas.openxmlformats.org/officeDocument/2006/relationships">
   <p:cSld>
@@ -3720,6 +3853,321 @@
           </a:p>
         </p:txBody>
       </p:sp>
+    </p:spTree>
+  </p:cSld>
+  <p:clrMapOvr>
+    <a:masterClrMapping/>
+  </p:clrMapOvr>
+</p:sld>
+</file>
+
+<file path=ppt/slides/slide5.xml><?xml version="1.0" encoding="utf-8"?>
+<p:sld xmlns:a="http://schemas.openxmlformats.org/drawingml/2006/main" xmlns:p="http://schemas.openxmlformats.org/presentationml/2006/main" xmlns:r="http://schemas.openxmlformats.org/officeDocument/2006/relationships">
+  <p:cSld>
+    <p:spTree>
+      <p:nvGrpSpPr>
+        <p:cNvPr id="1" name=""/>
+        <p:cNvGrpSpPr/>
+        <p:nvPr/>
+      </p:nvGrpSpPr>
+      <p:grpSpPr/>
+      <p:sp>
+        <p:nvSpPr>
+          <p:cNvPr id="2" name="Title 1"/>
+          <p:cNvSpPr>
+            <a:spLocks noGrp="1"/>
+          </p:cNvSpPr>
+          <p:nvPr>
+            <p:ph type="title"/>
+          </p:nvPr>
+        </p:nvSpPr>
+        <p:spPr/>
+        <p:txBody>
+          <a:bodyPr/>
+          <a:lstStyle/>
+          <a:p>
+            <a:r>
+              <a:t>Project &amp; CSV Details</a:t>
+            </a:r>
+          </a:p>
+        </p:txBody>
+      </p:sp>
+      <p:pic>
+        <p:nvPicPr>
+          <p:cNvPr id="3" name="Picture 2" descr="07_project_and_csv_details.png"/>
+          <p:cNvPicPr>
+            <a:picLocks noChangeAspect="1"/>
+          </p:cNvPicPr>
+          <p:nvPr/>
+        </p:nvPicPr>
+        <p:blipFill>
+          <a:blip r:embed="rId2"/>
+          <a:stretch>
+            <a:fillRect/>
+          </a:stretch>
+        </p:blipFill>
+        <p:spPr>
+          <a:xfrm>
+            <a:off x="640080" y="1143000"/>
+            <a:ext cx="10881360" cy="5509133"/>
+          </a:xfrm>
+          <a:prstGeom prst="rect">
+            <a:avLst/>
+          </a:prstGeom>
+        </p:spPr>
+      </p:pic>
+    </p:spTree>
+  </p:cSld>
+  <p:clrMapOvr>
+    <a:masterClrMapping/>
+  </p:clrMapOvr>
+</p:sld>
+</file>
+
+<file path=ppt/slides/slide6.xml><?xml version="1.0" encoding="utf-8"?>
+<p:sld xmlns:a="http://schemas.openxmlformats.org/drawingml/2006/main" xmlns:p="http://schemas.openxmlformats.org/presentationml/2006/main" xmlns:r="http://schemas.openxmlformats.org/officeDocument/2006/relationships">
+  <p:cSld>
+    <p:spTree>
+      <p:nvGrpSpPr>
+        <p:cNvPr id="1" name=""/>
+        <p:cNvGrpSpPr/>
+        <p:nvPr/>
+      </p:nvGrpSpPr>
+      <p:grpSpPr/>
+      <p:sp>
+        <p:nvSpPr>
+          <p:cNvPr id="2" name="Title 1"/>
+          <p:cNvSpPr>
+            <a:spLocks noGrp="1"/>
+          </p:cNvSpPr>
+          <p:nvPr>
+            <p:ph type="title"/>
+          </p:nvPr>
+        </p:nvSpPr>
+        <p:spPr/>
+        <p:txBody>
+          <a:bodyPr/>
+          <a:lstStyle/>
+          <a:p>
+            <a:r>
+              <a:t>Analysis Results</a:t>
+            </a:r>
+          </a:p>
+        </p:txBody>
+      </p:sp>
+      <p:pic>
+        <p:nvPicPr>
+          <p:cNvPr id="3" name="Picture 2" descr="06_analysis_results_summary.png"/>
+          <p:cNvPicPr>
+            <a:picLocks noChangeAspect="1"/>
+          </p:cNvPicPr>
+          <p:nvPr/>
+        </p:nvPicPr>
+        <p:blipFill>
+          <a:blip r:embed="rId2"/>
+          <a:stretch>
+            <a:fillRect/>
+          </a:stretch>
+        </p:blipFill>
+        <p:spPr>
+          <a:xfrm>
+            <a:off x="640080" y="1143000"/>
+            <a:ext cx="10881360" cy="5633270"/>
+          </a:xfrm>
+          <a:prstGeom prst="rect">
+            <a:avLst/>
+          </a:prstGeom>
+        </p:spPr>
+      </p:pic>
+    </p:spTree>
+  </p:cSld>
+  <p:clrMapOvr>
+    <a:masterClrMapping/>
+  </p:clrMapOvr>
+</p:sld>
+</file>
+
+<file path=ppt/slides/slide7.xml><?xml version="1.0" encoding="utf-8"?>
+<p:sld xmlns:a="http://schemas.openxmlformats.org/drawingml/2006/main" xmlns:p="http://schemas.openxmlformats.org/presentationml/2006/main" xmlns:r="http://schemas.openxmlformats.org/officeDocument/2006/relationships">
+  <p:cSld>
+    <p:spTree>
+      <p:nvGrpSpPr>
+        <p:cNvPr id="1" name=""/>
+        <p:cNvGrpSpPr/>
+        <p:nvPr/>
+      </p:nvGrpSpPr>
+      <p:grpSpPr/>
+      <p:sp>
+        <p:nvSpPr>
+          <p:cNvPr id="2" name="Title 1"/>
+          <p:cNvSpPr>
+            <a:spLocks noGrp="1"/>
+          </p:cNvSpPr>
+          <p:nvPr>
+            <p:ph type="title"/>
+          </p:nvPr>
+        </p:nvSpPr>
+        <p:spPr/>
+        <p:txBody>
+          <a:bodyPr/>
+          <a:lstStyle/>
+          <a:p>
+            <a:r>
+              <a:t>01 Attrition By Tenure</a:t>
+            </a:r>
+          </a:p>
+        </p:txBody>
+      </p:sp>
+      <p:pic>
+        <p:nvPicPr>
+          <p:cNvPr id="3" name="Picture 2" descr="01_attrition_by_tenure.png"/>
+          <p:cNvPicPr>
+            <a:picLocks noChangeAspect="1"/>
+          </p:cNvPicPr>
+          <p:nvPr/>
+        </p:nvPicPr>
+        <p:blipFill>
+          <a:blip r:embed="rId2"/>
+          <a:stretch>
+            <a:fillRect/>
+          </a:stretch>
+        </p:blipFill>
+        <p:spPr>
+          <a:xfrm>
+            <a:off x="731520" y="1143000"/>
+            <a:ext cx="10698480" cy="6686550"/>
+          </a:xfrm>
+          <a:prstGeom prst="rect">
+            <a:avLst/>
+          </a:prstGeom>
+        </p:spPr>
+      </p:pic>
+    </p:spTree>
+  </p:cSld>
+  <p:clrMapOvr>
+    <a:masterClrMapping/>
+  </p:clrMapOvr>
+</p:sld>
+</file>
+
+<file path=ppt/slides/slide8.xml><?xml version="1.0" encoding="utf-8"?>
+<p:sld xmlns:a="http://schemas.openxmlformats.org/drawingml/2006/main" xmlns:p="http://schemas.openxmlformats.org/presentationml/2006/main" xmlns:r="http://schemas.openxmlformats.org/officeDocument/2006/relationships">
+  <p:cSld>
+    <p:spTree>
+      <p:nvGrpSpPr>
+        <p:cNvPr id="1" name=""/>
+        <p:cNvGrpSpPr/>
+        <p:nvPr/>
+      </p:nvGrpSpPr>
+      <p:grpSpPr/>
+      <p:sp>
+        <p:nvSpPr>
+          <p:cNvPr id="2" name="Title 1"/>
+          <p:cNvSpPr>
+            <a:spLocks noGrp="1"/>
+          </p:cNvSpPr>
+          <p:nvPr>
+            <p:ph type="title"/>
+          </p:nvPr>
+        </p:nvSpPr>
+        <p:spPr/>
+        <p:txBody>
+          <a:bodyPr/>
+          <a:lstStyle/>
+          <a:p>
+            <a:r>
+              <a:t>02 Attrition By Department</a:t>
+            </a:r>
+          </a:p>
+        </p:txBody>
+      </p:sp>
+      <p:pic>
+        <p:nvPicPr>
+          <p:cNvPr id="3" name="Picture 2" descr="02_attrition_by_department.png"/>
+          <p:cNvPicPr>
+            <a:picLocks noChangeAspect="1"/>
+          </p:cNvPicPr>
+          <p:nvPr/>
+        </p:nvPicPr>
+        <p:blipFill>
+          <a:blip r:embed="rId2"/>
+          <a:stretch>
+            <a:fillRect/>
+          </a:stretch>
+        </p:blipFill>
+        <p:spPr>
+          <a:xfrm>
+            <a:off x="731520" y="1143000"/>
+            <a:ext cx="10698480" cy="6686550"/>
+          </a:xfrm>
+          <a:prstGeom prst="rect">
+            <a:avLst/>
+          </a:prstGeom>
+        </p:spPr>
+      </p:pic>
+    </p:spTree>
+  </p:cSld>
+  <p:clrMapOvr>
+    <a:masterClrMapping/>
+  </p:clrMapOvr>
+</p:sld>
+</file>
+
+<file path=ppt/slides/slide9.xml><?xml version="1.0" encoding="utf-8"?>
+<p:sld xmlns:a="http://schemas.openxmlformats.org/drawingml/2006/main" xmlns:p="http://schemas.openxmlformats.org/presentationml/2006/main" xmlns:r="http://schemas.openxmlformats.org/officeDocument/2006/relationships">
+  <p:cSld>
+    <p:spTree>
+      <p:nvGrpSpPr>
+        <p:cNvPr id="1" name=""/>
+        <p:cNvGrpSpPr/>
+        <p:nvPr/>
+      </p:nvGrpSpPr>
+      <p:grpSpPr/>
+      <p:sp>
+        <p:nvSpPr>
+          <p:cNvPr id="2" name="Title 1"/>
+          <p:cNvSpPr>
+            <a:spLocks noGrp="1"/>
+          </p:cNvSpPr>
+          <p:nvPr>
+            <p:ph type="title"/>
+          </p:nvPr>
+        </p:nvSpPr>
+        <p:spPr/>
+        <p:txBody>
+          <a:bodyPr/>
+          <a:lstStyle/>
+          <a:p>
+            <a:r>
+              <a:t>03 Attrition By Overtime</a:t>
+            </a:r>
+          </a:p>
+        </p:txBody>
+      </p:sp>
+      <p:pic>
+        <p:nvPicPr>
+          <p:cNvPr id="3" name="Picture 2" descr="03_attrition_by_overtime.png"/>
+          <p:cNvPicPr>
+            <a:picLocks noChangeAspect="1"/>
+          </p:cNvPicPr>
+          <p:nvPr/>
+        </p:nvPicPr>
+        <p:blipFill>
+          <a:blip r:embed="rId2"/>
+          <a:stretch>
+            <a:fillRect/>
+          </a:stretch>
+        </p:blipFill>
+        <p:spPr>
+          <a:xfrm>
+            <a:off x="731520" y="1143000"/>
+            <a:ext cx="10698480" cy="6686550"/>
+          </a:xfrm>
+          <a:prstGeom prst="rect">
+            <a:avLst/>
+          </a:prstGeom>
+        </p:spPr>
+      </p:pic>
     </p:spTree>
   </p:cSld>
   <p:clrMapOvr>
